--- a/Template slide.pptx
+++ b/Template slide.pptx
@@ -263,7 +263,7 @@
           <a:p>
             <a:fld id="{297D0860-531C-6841-B6C8-FF980A9B01E5}" type="datetimeFigureOut">
               <a:rPr lang="en-AU" smtClean="0"/>
-              <a:t>28/5/2026</a:t>
+              <a:t>29/5/2026</a:t>
             </a:fld>
             <a:endParaRPr lang="en-AU"/>
           </a:p>
@@ -463,7 +463,7 @@
           <a:p>
             <a:fld id="{297D0860-531C-6841-B6C8-FF980A9B01E5}" type="datetimeFigureOut">
               <a:rPr lang="en-AU" smtClean="0"/>
-              <a:t>28/5/2026</a:t>
+              <a:t>29/5/2026</a:t>
             </a:fld>
             <a:endParaRPr lang="en-AU"/>
           </a:p>
@@ -673,7 +673,7 @@
           <a:p>
             <a:fld id="{297D0860-531C-6841-B6C8-FF980A9B01E5}" type="datetimeFigureOut">
               <a:rPr lang="en-AU" smtClean="0"/>
-              <a:t>28/5/2026</a:t>
+              <a:t>29/5/2026</a:t>
             </a:fld>
             <a:endParaRPr lang="en-AU"/>
           </a:p>
@@ -873,7 +873,7 @@
           <a:p>
             <a:fld id="{297D0860-531C-6841-B6C8-FF980A9B01E5}" type="datetimeFigureOut">
               <a:rPr lang="en-AU" smtClean="0"/>
-              <a:t>28/5/2026</a:t>
+              <a:t>29/5/2026</a:t>
             </a:fld>
             <a:endParaRPr lang="en-AU"/>
           </a:p>
@@ -1149,7 +1149,7 @@
           <a:p>
             <a:fld id="{297D0860-531C-6841-B6C8-FF980A9B01E5}" type="datetimeFigureOut">
               <a:rPr lang="en-AU" smtClean="0"/>
-              <a:t>28/5/2026</a:t>
+              <a:t>29/5/2026</a:t>
             </a:fld>
             <a:endParaRPr lang="en-AU"/>
           </a:p>
@@ -1417,7 +1417,7 @@
           <a:p>
             <a:fld id="{297D0860-531C-6841-B6C8-FF980A9B01E5}" type="datetimeFigureOut">
               <a:rPr lang="en-AU" smtClean="0"/>
-              <a:t>28/5/2026</a:t>
+              <a:t>29/5/2026</a:t>
             </a:fld>
             <a:endParaRPr lang="en-AU"/>
           </a:p>
@@ -1832,7 +1832,7 @@
           <a:p>
             <a:fld id="{297D0860-531C-6841-B6C8-FF980A9B01E5}" type="datetimeFigureOut">
               <a:rPr lang="en-AU" smtClean="0"/>
-              <a:t>28/5/2026</a:t>
+              <a:t>29/5/2026</a:t>
             </a:fld>
             <a:endParaRPr lang="en-AU"/>
           </a:p>
@@ -1974,7 +1974,7 @@
           <a:p>
             <a:fld id="{297D0860-531C-6841-B6C8-FF980A9B01E5}" type="datetimeFigureOut">
               <a:rPr lang="en-AU" smtClean="0"/>
-              <a:t>28/5/2026</a:t>
+              <a:t>29/5/2026</a:t>
             </a:fld>
             <a:endParaRPr lang="en-AU"/>
           </a:p>
@@ -2087,7 +2087,7 @@
           <a:p>
             <a:fld id="{297D0860-531C-6841-B6C8-FF980A9B01E5}" type="datetimeFigureOut">
               <a:rPr lang="en-AU" smtClean="0"/>
-              <a:t>28/5/2026</a:t>
+              <a:t>29/5/2026</a:t>
             </a:fld>
             <a:endParaRPr lang="en-AU"/>
           </a:p>
@@ -2400,7 +2400,7 @@
           <a:p>
             <a:fld id="{297D0860-531C-6841-B6C8-FF980A9B01E5}" type="datetimeFigureOut">
               <a:rPr lang="en-AU" smtClean="0"/>
-              <a:t>28/5/2026</a:t>
+              <a:t>29/5/2026</a:t>
             </a:fld>
             <a:endParaRPr lang="en-AU"/>
           </a:p>
@@ -2689,7 +2689,7 @@
           <a:p>
             <a:fld id="{297D0860-531C-6841-B6C8-FF980A9B01E5}" type="datetimeFigureOut">
               <a:rPr lang="en-AU" smtClean="0"/>
-              <a:t>28/5/2026</a:t>
+              <a:t>29/5/2026</a:t>
             </a:fld>
             <a:endParaRPr lang="en-AU"/>
           </a:p>
@@ -2932,7 +2932,7 @@
           <a:p>
             <a:fld id="{297D0860-531C-6841-B6C8-FF980A9B01E5}" type="datetimeFigureOut">
               <a:rPr lang="en-AU" smtClean="0"/>
-              <a:t>28/5/2026</a:t>
+              <a:t>29/5/2026</a:t>
             </a:fld>
             <a:endParaRPr lang="en-AU"/>
           </a:p>
@@ -5695,8 +5695,8 @@
         </p:nvSpPr>
         <p:spPr>
           <a:xfrm>
-            <a:off x="1410262" y="6642555"/>
-            <a:ext cx="9371476" cy="215444"/>
+            <a:off x="5713524" y="6642555"/>
+            <a:ext cx="764953" cy="215444"/>
           </a:xfrm>
           <a:prstGeom prst="rect">
             <a:avLst/>
@@ -5711,15 +5711,7 @@
           <a:p>
             <a:r>
               <a:rPr lang="en-AU" sz="800" i="1" dirty="0"/>
-              <a:t>Sources: Mordor Intelligence, Grand View Research, GM Insights, Clarivate, Credence Research, </a:t>
-            </a:r>
-            <a:r>
-              <a:rPr lang="en-AU" sz="800" i="1" dirty="0" err="1"/>
-              <a:t>DelveInsight</a:t>
-            </a:r>
-            <a:r>
-              <a:rPr lang="en-AU" sz="800" i="1" dirty="0"/>
-              <a:t>, company filings (2024-2025). Market sizes vary by scope (aesthetic vs total, advanced vs all-stage).</a:t>
+              <a:t>Sources: XXX</a:t>
             </a:r>
           </a:p>
         </p:txBody>
@@ -6694,7 +6686,7 @@
         </p:nvSpPr>
         <p:spPr>
           <a:xfrm>
-            <a:off x="451104" y="5931179"/>
+            <a:off x="451104" y="4939228"/>
             <a:ext cx="2900922" cy="45719"/>
           </a:xfrm>
           <a:prstGeom prst="rect">
@@ -6746,7 +6738,7 @@
         </p:nvSpPr>
         <p:spPr>
           <a:xfrm>
-            <a:off x="375258" y="5584706"/>
+            <a:off x="375258" y="4592755"/>
             <a:ext cx="2115451" cy="369332"/>
           </a:xfrm>
           <a:prstGeom prst="rect">
@@ -6785,7 +6777,7 @@
         </p:nvSpPr>
         <p:spPr>
           <a:xfrm>
-            <a:off x="7368561" y="5024970"/>
+            <a:off x="7368561" y="4939228"/>
             <a:ext cx="2900922" cy="45719"/>
           </a:xfrm>
           <a:prstGeom prst="rect">
@@ -6837,7 +6829,7 @@
         </p:nvSpPr>
         <p:spPr>
           <a:xfrm>
-            <a:off x="7292715" y="4678497"/>
+            <a:off x="7292715" y="4592755"/>
             <a:ext cx="2329292" cy="369332"/>
           </a:xfrm>
           <a:prstGeom prst="rect">
@@ -6876,7 +6868,7 @@
         </p:nvSpPr>
         <p:spPr>
           <a:xfrm>
-            <a:off x="451104" y="5976898"/>
+            <a:off x="451104" y="4984947"/>
             <a:ext cx="6604001" cy="276999"/>
           </a:xfrm>
           <a:prstGeom prst="rect">
@@ -6915,7 +6907,7 @@
         </p:nvSpPr>
         <p:spPr>
           <a:xfrm>
-            <a:off x="7292715" y="5116925"/>
+            <a:off x="7292715" y="4984947"/>
             <a:ext cx="4814082" cy="1015663"/>
           </a:xfrm>
           <a:prstGeom prst="rect">
@@ -6969,7 +6961,7 @@
         </p:nvSpPr>
         <p:spPr>
           <a:xfrm>
-            <a:off x="451105" y="4524390"/>
+            <a:off x="451105" y="3532439"/>
             <a:ext cx="6765764" cy="461665"/>
           </a:xfrm>
           <a:prstGeom prst="rect">
